--- a/presentation/Module-3_Establishing-Governance-and-Writing-a-Clarified-Specification.pptx
+++ b/presentation/Module-3_Establishing-Governance-and-Writing-a-Clarified-Specification.pptx
@@ -16,10 +16,9 @@
     <p:sldId id="264" r:id="rId10"/>
     <p:sldId id="265" r:id="rId11"/>
     <p:sldId id="266" r:id="rId12"/>
-    <p:sldId id="267" r:id="rId13"/>
   </p:sldIdLst>
   <p:notesMasterIdLst>
-    <p:notesMasterId r:id="rId14"/>
+    <p:notesMasterId r:id="rId13"/>
   </p:notesMasterIdLst>
   <p:sldSz cx="12192000" cy="6858000"/>
   <p:notesSz cx="6858000" cy="12192000"/>
@@ -713,94 +712,6 @@
             <a:fld id="{F7021451-1387-4CA6-816F-3879F97B5CBC}" type="slidenum">
               <a:rPr lang="en-US"/>
               <a:t>11</a:t>
-            </a:fld>
-            <a:endParaRPr lang="en-US"/>
-          </a:p>
-        </p:txBody>
-      </p:sp>
-    </p:spTree>
-    <p:extLst>
-      <p:ext uri="{BB962C8B-B14F-4D97-AF65-F5344CB8AC3E}">
-        <p14:creationId xmlns:p14="http://schemas.microsoft.com/office/powerpoint/2010/main" val="1024086991"/>
-      </p:ext>
-    </p:extLst>
-  </p:cSld>
-  <p:clrMapOvr>
-    <a:masterClrMapping/>
-  </p:clrMapOvr>
-</p:notes>
-</file>
-
-<file path=ppt/notesSlides/notesSlide12.xml><?xml version="1.0" encoding="utf-8"?>
-<p:notes xmlns:a="http://schemas.openxmlformats.org/drawingml/2006/main" xmlns:r="http://schemas.openxmlformats.org/officeDocument/2006/relationships" xmlns:p="http://schemas.openxmlformats.org/presentationml/2006/main">
-  <p:cSld>
-    <p:spTree>
-      <p:nvGrpSpPr>
-        <p:cNvPr id="1" name=""/>
-        <p:cNvGrpSpPr/>
-        <p:nvPr/>
-      </p:nvGrpSpPr>
-      <p:grpSpPr>
-        <a:xfrm>
-          <a:off x="0" y="0"/>
-          <a:ext cx="0" cy="0"/>
-          <a:chOff x="0" y="0"/>
-          <a:chExt cx="0" cy="0"/>
-        </a:xfrm>
-      </p:grpSpPr>
-      <p:sp>
-        <p:nvSpPr>
-          <p:cNvPr id="2" name="Slide Image Placeholder 1"/>
-          <p:cNvSpPr>
-            <a:spLocks noGrp="1" noRot="1" noChangeAspect="1"/>
-          </p:cNvSpPr>
-          <p:nvPr>
-            <p:ph type="sldImg"/>
-          </p:nvPr>
-        </p:nvSpPr>
-        <p:spPr/>
-      </p:sp>
-      <p:sp>
-        <p:nvSpPr>
-          <p:cNvPr id="3" name="Notes Placeholder 2"/>
-          <p:cNvSpPr>
-            <a:spLocks noGrp="1"/>
-          </p:cNvSpPr>
-          <p:nvPr>
-            <p:ph type="body" idx="1"/>
-          </p:nvPr>
-        </p:nvSpPr>
-        <p:spPr/>
-        <p:txBody>
-          <a:bodyPr/>
-          <a:lstStyle/>
-          <a:p>
-            <a:r>
-              <a:rPr lang="en-US" dirty="0"/>
-              <a:t/>
-            </a:r>
-            <a:endParaRPr lang="en-US" dirty="0"/>
-          </a:p>
-        </p:txBody>
-      </p:sp>
-      <p:sp>
-        <p:nvSpPr>
-          <p:cNvPr id="4" name="Slide Number Placeholder 3"/>
-          <p:cNvSpPr>
-            <a:spLocks noGrp="1"/>
-          </p:cNvSpPr>
-          <p:nvPr>
-            <p:ph type="sldNum" sz="quarter" idx="10"/>
-          </p:nvPr>
-        </p:nvSpPr>
-        <p:spPr/>
-        <p:txBody>
-          <a:bodyPr/>
-          <a:lstStyle/>
-          <a:p>
-            <a:fld id="{F7021451-1387-4CA6-816F-3879F97B5CBC}" type="slidenum">
-              <a:rPr lang="en-US"/>
-              <a:t>12</a:t>
             </a:fld>
             <a:endParaRPr lang="en-US"/>
           </a:p>
@@ -3384,260 +3295,6 @@
 </p:sld>
 </file>
 
-<file path=ppt/slides/slide12.xml><?xml version="1.0" encoding="utf-8"?>
-<p:sld xmlns:a="http://schemas.openxmlformats.org/drawingml/2006/main" xmlns:r="http://schemas.openxmlformats.org/officeDocument/2006/relationships" xmlns:p="http://schemas.openxmlformats.org/presentationml/2006/main">
-  <p:cSld name="Slide 12">
-    <p:bg>
-      <p:bgPr>
-        <a:solidFill>
-          <a:srgbClr val="FFFFFF"/>
-        </a:solidFill>
-      </p:bgPr>
-    </p:bg>
-    <p:spTree>
-      <p:nvGrpSpPr>
-        <p:cNvPr id="1" name=""/>
-        <p:cNvGrpSpPr/>
-        <p:nvPr/>
-      </p:nvGrpSpPr>
-      <p:grpSpPr>
-        <a:xfrm>
-          <a:off x="0" y="0"/>
-          <a:ext cx="0" cy="0"/>
-          <a:chOff x="0" y="0"/>
-          <a:chExt cx="0" cy="0"/>
-        </a:xfrm>
-      </p:grpSpPr>
-      <p:sp>
-        <p:nvSpPr>
-          <p:cNvPr id="2" name="Shape 0"/>
-          <p:cNvSpPr/>
-          <p:nvPr/>
-        </p:nvSpPr>
-        <p:spPr>
-          <a:xfrm>
-            <a:off x="548640" y="1828800"/>
-            <a:ext cx="11094415" cy="2377440"/>
-          </a:xfrm>
-          <a:prstGeom prst="roundRect">
-            <a:avLst>
-              <a:gd name="adj" fmla="val 4615"/>
-            </a:avLst>
-          </a:prstGeom>
-          <a:solidFill>
-            <a:srgbClr val="F2F5F9"/>
-          </a:solidFill>
-          <a:ln w="15875">
-            <a:solidFill>
-              <a:srgbClr val="C0504D"/>
-            </a:solidFill>
-            <a:prstDash val="solid"/>
-          </a:ln>
-        </p:spPr>
-      </p:sp>
-      <p:sp>
-        <p:nvSpPr>
-          <p:cNvPr id="3" name="Text 1"/>
-          <p:cNvSpPr/>
-          <p:nvPr/>
-        </p:nvSpPr>
-        <p:spPr>
-          <a:xfrm>
-            <a:off x="1005840" y="2103120"/>
-            <a:ext cx="10180015" cy="365760"/>
-          </a:xfrm>
-          <a:prstGeom prst="rect">
-            <a:avLst/>
-          </a:prstGeom>
-          <a:noFill/>
-          <a:ln/>
-        </p:spPr>
-        <p:txBody>
-          <a:bodyPr wrap="square" rtlCol="0" anchor="ctr"/>
-          <a:lstStyle/>
-          <a:p>
-            <a:pPr indent="0" marL="0">
-              <a:buNone/>
-            </a:pPr>
-            <a:r>
-              <a:rPr lang="en-US" sz="1300" b="1" spc="150" kern="0" dirty="0">
-                <a:solidFill>
-                  <a:srgbClr val="C0504D"/>
-                </a:solidFill>
-                <a:latin typeface="Calibri" pitchFamily="34" charset="0"/>
-                <a:ea typeface="Calibri" pitchFamily="34" charset="-122"/>
-                <a:cs typeface="Calibri" pitchFamily="34" charset="-120"/>
-              </a:rPr>
-              <a:t>HANDS-ON NEXT</a:t>
-            </a:r>
-            <a:endParaRPr lang="en-US" sz="1300" dirty="0"/>
-          </a:p>
-        </p:txBody>
-      </p:sp>
-      <p:sp>
-        <p:nvSpPr>
-          <p:cNvPr id="4" name="Text 2"/>
-          <p:cNvSpPr/>
-          <p:nvPr/>
-        </p:nvSpPr>
-        <p:spPr>
-          <a:xfrm>
-            <a:off x="1005840" y="2514600"/>
-            <a:ext cx="10180015" cy="1463040"/>
-          </a:xfrm>
-          <a:prstGeom prst="rect">
-            <a:avLst/>
-          </a:prstGeom>
-          <a:noFill/>
-          <a:ln/>
-        </p:spPr>
-        <p:txBody>
-          <a:bodyPr wrap="square" rtlCol="0" anchor="t"/>
-          <a:lstStyle/>
-          <a:p>
-            <a:pPr indent="0" marL="0">
-              <a:buNone/>
-            </a:pPr>
-            <a:r>
-              <a:rPr lang="en-US" sz="1700" dirty="0">
-                <a:solidFill>
-                  <a:srgbClr val="1B2A4A"/>
-                </a:solidFill>
-                <a:latin typeface="Calibri" pitchFamily="34" charset="0"/>
-                <a:ea typeface="Calibri" pitchFamily="34" charset="-122"/>
-                <a:cs typeface="Calibri" pitchFamily="34" charset="-120"/>
-              </a:rPr>
-              <a:t>Write a constitution for your project, building on Module 2's discovery. Draft two specs against it: one for a new feature, one for the defect you pulled from the tracker. Run a clarify pass on both, then choose one to carry forward and set the other aside for Module 8.</a:t>
-            </a:r>
-            <a:endParaRPr lang="en-US" sz="1700" dirty="0"/>
-          </a:p>
-        </p:txBody>
-      </p:sp>
-      <p:sp>
-        <p:nvSpPr>
-          <p:cNvPr id="5" name="Text 3"/>
-          <p:cNvSpPr/>
-          <p:nvPr/>
-        </p:nvSpPr>
-        <p:spPr>
-          <a:xfrm>
-            <a:off x="548640" y="4480560"/>
-            <a:ext cx="11094415" cy="457200"/>
-          </a:xfrm>
-          <a:prstGeom prst="rect">
-            <a:avLst/>
-          </a:prstGeom>
-          <a:noFill/>
-          <a:ln/>
-        </p:spPr>
-        <p:txBody>
-          <a:bodyPr wrap="square" rtlCol="0" anchor="ctr"/>
-          <a:lstStyle/>
-          <a:p>
-            <a:pPr algn="ctr" indent="0" marL="0">
-              <a:buNone/>
-            </a:pPr>
-            <a:r>
-              <a:rPr lang="en-US" sz="1300" i="1" dirty="0">
-                <a:solidFill>
-                  <a:srgbClr val="5A6B85"/>
-                </a:solidFill>
-                <a:latin typeface="Calibri" pitchFamily="34" charset="0"/>
-                <a:ea typeface="Calibri" pitchFamily="34" charset="-122"/>
-                <a:cs typeface="Calibri" pitchFamily="34" charset="-120"/>
-              </a:rPr>
-              <a:t>Next: Module 4: From Clarified Spec to Reviewable Plan</a:t>
-            </a:r>
-            <a:endParaRPr lang="en-US" sz="1300" dirty="0"/>
-          </a:p>
-        </p:txBody>
-      </p:sp>
-      <p:sp>
-        <p:nvSpPr>
-          <p:cNvPr id="6" name="Text 4"/>
-          <p:cNvSpPr/>
-          <p:nvPr/>
-        </p:nvSpPr>
-        <p:spPr>
-          <a:xfrm>
-            <a:off x="548640" y="6473952"/>
-            <a:ext cx="5486400" cy="274320"/>
-          </a:xfrm>
-          <a:prstGeom prst="rect">
-            <a:avLst/>
-          </a:prstGeom>
-          <a:noFill/>
-          <a:ln/>
-        </p:spPr>
-        <p:txBody>
-          <a:bodyPr wrap="square" rtlCol="0" anchor="ctr"/>
-          <a:lstStyle/>
-          <a:p>
-            <a:pPr algn="l" indent="0" marL="0">
-              <a:buNone/>
-            </a:pPr>
-            <a:r>
-              <a:rPr lang="en-US" sz="1000" dirty="0">
-                <a:solidFill>
-                  <a:srgbClr val="5A6B85"/>
-                </a:solidFill>
-                <a:latin typeface="Calibri" pitchFamily="34" charset="0"/>
-                <a:ea typeface="Calibri" pitchFamily="34" charset="-122"/>
-                <a:cs typeface="Calibri" pitchFamily="34" charset="-120"/>
-              </a:rPr>
-              <a:t>Module 3</a:t>
-            </a:r>
-            <a:endParaRPr lang="en-US" sz="1000" dirty="0"/>
-          </a:p>
-        </p:txBody>
-      </p:sp>
-      <p:sp>
-        <p:nvSpPr>
-          <p:cNvPr id="7" name="Text 5"/>
-          <p:cNvSpPr/>
-          <p:nvPr/>
-        </p:nvSpPr>
-        <p:spPr>
-          <a:xfrm>
-            <a:off x="6156655" y="6473952"/>
-            <a:ext cx="5486400" cy="274320"/>
-          </a:xfrm>
-          <a:prstGeom prst="rect">
-            <a:avLst/>
-          </a:prstGeom>
-          <a:noFill/>
-          <a:ln/>
-        </p:spPr>
-        <p:txBody>
-          <a:bodyPr wrap="square" rtlCol="0" anchor="ctr"/>
-          <a:lstStyle/>
-          <a:p>
-            <a:pPr algn="r" indent="0" marL="0">
-              <a:buNone/>
-            </a:pPr>
-            <a:r>
-              <a:rPr lang="en-US" sz="1000" dirty="0">
-                <a:solidFill>
-                  <a:srgbClr val="5A6B85"/>
-                </a:solidFill>
-                <a:latin typeface="Calibri" pitchFamily="34" charset="0"/>
-                <a:ea typeface="Calibri" pitchFamily="34" charset="-122"/>
-                <a:cs typeface="Calibri" pitchFamily="34" charset="-120"/>
-              </a:rPr>
-              <a:t>Spec-Driven Development with Agentic AI</a:t>
-            </a:r>
-            <a:endParaRPr lang="en-US" sz="1000" dirty="0"/>
-          </a:p>
-        </p:txBody>
-      </p:sp>
-    </p:spTree>
-  </p:cSld>
-  <p:clrMapOvr>
-    <a:masterClrMapping/>
-  </p:clrMapOvr>
-</p:sld>
-</file>
-
 <file path=ppt/slides/slide2.xml><?xml version="1.0" encoding="utf-8"?>
 <p:sld xmlns:a="http://schemas.openxmlformats.org/drawingml/2006/main" xmlns:r="http://schemas.openxmlformats.org/officeDocument/2006/relationships" xmlns:p="http://schemas.openxmlformats.org/presentationml/2006/main">
   <p:cSld name="Slide 2">
@@ -5212,7 +4869,7 @@
                 <a:ea typeface="Calibri" pitchFamily="34" charset="-122"/>
                 <a:cs typeface="Calibri" pitchFamily="34" charset="-120"/>
               </a:rPr>
-              <a:t>Constitution and clarified spec → requirements and design.</a:t>
+              <a:t>Constitution and clarified spec approximate requirements and design.</a:t>
             </a:r>
             <a:endParaRPr lang="en-US" sz="1500" dirty="0"/>
           </a:p>
@@ -5273,7 +4930,7 @@
                 <a:ea typeface="Calibri" pitchFamily="34" charset="-122"/>
                 <a:cs typeface="Calibri" pitchFamily="34" charset="-120"/>
               </a:rPr>
-              <a:t>Plan and tasks → technical design and iteration planning.</a:t>
+              <a:t>Plan and tasks approximate technical design and iteration planning.</a:t>
             </a:r>
             <a:endParaRPr lang="en-US" sz="1500" dirty="0"/>
           </a:p>
@@ -5334,7 +4991,7 @@
                 <a:ea typeface="Calibri" pitchFamily="34" charset="-122"/>
                 <a:cs typeface="Calibri" pitchFamily="34" charset="-120"/>
               </a:rPr>
-              <a:t>Checklist and analyze → QA and test planning. Implement → development. Review and living docs → code review, QA, and maintenance.</a:t>
+              <a:t>Checklist and analyze approximate QA and test planning. Implement approximates development. Review and living docs approximate code review, QA, and maintenance.</a:t>
             </a:r>
             <a:endParaRPr lang="en-US" sz="1500" dirty="0"/>
           </a:p>

--- a/presentation/Module-3_Establishing-Governance-and-Writing-a-Clarified-Specification.pptx
+++ b/presentation/Module-3_Establishing-Governance-and-Writing-a-Clarified-Specification.pptx
@@ -1456,6 +1456,54 @@
           <a:chExt cx="0" cy="0"/>
         </a:xfrm>
       </p:grpSpPr>
+      <p:sp>
+        <p:nvSpPr>
+          <p:cNvPr id="25" name="Slide Number Placeholder 0"/>
+          <p:cNvSpPr>
+            <a:spLocks noGrp="1"/>
+          </p:cNvSpPr>
+          <p:nvPr>
+            <p:ph type="sldNum" sz="quarter" idx="4294967295"/>
+          </p:nvPr>
+        </p:nvSpPr>
+        <p:spPr>
+          <a:xfrm>
+            <a:off x="5821528" y="6473952"/>
+            <a:ext cx="548640" cy="274320"/>
+          </a:xfrm>
+          <a:prstGeom prst="rect">
+            <a:avLst/>
+          </a:prstGeom>
+          <a:extLst>
+            <a:ext uri="{C572A759-6A51-4108-AA02-DFA0A04FC94B}">
+              <ma14:wrappingTextBoxFlag xmlns:ma14="http://schemas.microsoft.com/office/mac/drawingml/2011/main" val="0"/>
+            </a:ext>
+          </a:extLst>
+        </p:spPr>
+        <p:txBody>
+          <a:bodyPr anchor="ctr"/>
+          <a:lstStyle>
+            <a:lvl1pPr>
+              <a:defRPr sz="1000">
+                <a:solidFill>
+                  <a:srgbClr val="8CA3C7"/>
+                </a:solidFill>
+                <a:latin typeface="Calibri"/>
+                <a:ea typeface="Calibri"/>
+                <a:cs typeface="Calibri"/>
+              </a:defRPr>
+            </a:lvl1pPr>
+          </a:lstStyle>
+          <a:p>
+            <a:pPr algn="ctr"/>
+            <a:fld id="{F7021451-1387-4CA6-816F-3879F97B5CBC}" type="slidenum">
+              <a:rPr b="0" lang="en-US"/>
+              <a:t>1000</a:t>
+            </a:fld>
+            <a:endParaRPr lang="en-US"/>
+          </a:p>
+        </p:txBody>
+      </p:sp>
     </p:spTree>
   </p:cSld>
   <p:clrMapOvr>
@@ -1481,6 +1529,54 @@
           <a:chExt cx="0" cy="0"/>
         </a:xfrm>
       </p:grpSpPr>
+      <p:sp>
+        <p:nvSpPr>
+          <p:cNvPr id="25" name="Slide Number Placeholder 0"/>
+          <p:cNvSpPr>
+            <a:spLocks noGrp="1"/>
+          </p:cNvSpPr>
+          <p:nvPr>
+            <p:ph type="sldNum" sz="quarter" idx="4294967295"/>
+          </p:nvPr>
+        </p:nvSpPr>
+        <p:spPr>
+          <a:xfrm>
+            <a:off x="5821528" y="6473952"/>
+            <a:ext cx="548640" cy="274320"/>
+          </a:xfrm>
+          <a:prstGeom prst="rect">
+            <a:avLst/>
+          </a:prstGeom>
+          <a:extLst>
+            <a:ext uri="{C572A759-6A51-4108-AA02-DFA0A04FC94B}">
+              <ma14:wrappingTextBoxFlag xmlns:ma14="http://schemas.microsoft.com/office/mac/drawingml/2011/main" val="0"/>
+            </a:ext>
+          </a:extLst>
+        </p:spPr>
+        <p:txBody>
+          <a:bodyPr anchor="ctr"/>
+          <a:lstStyle>
+            <a:lvl1pPr>
+              <a:defRPr sz="1000">
+                <a:solidFill>
+                  <a:srgbClr val="8CA3C7"/>
+                </a:solidFill>
+                <a:latin typeface="Calibri"/>
+                <a:ea typeface="Calibri"/>
+                <a:cs typeface="Calibri"/>
+              </a:defRPr>
+            </a:lvl1pPr>
+          </a:lstStyle>
+          <a:p>
+            <a:pPr algn="ctr"/>
+            <a:fld id="{F7021451-1387-4CA6-816F-3879F97B5CBC}" type="slidenum">
+              <a:rPr b="0" lang="en-US"/>
+              <a:t>null</a:t>
+            </a:fld>
+            <a:endParaRPr lang="en-US"/>
+          </a:p>
+        </p:txBody>
+      </p:sp>
     </p:spTree>
   </p:cSld>
   <p:clrMap bg1="lt1" tx1="dk1" bg2="lt2" tx2="dk2" accent1="accent1" accent2="accent2" accent3="accent3" accent4="accent4" accent5="accent5" accent6="accent6" hlink="hlink" folHlink="folHlink"/>
@@ -1983,6 +2079,54 @@
               <a:t>Set the standard everything else gets checked against, then write against it.</a:t>
             </a:r>
             <a:endParaRPr lang="en-US" sz="1800" dirty="0"/>
+          </a:p>
+        </p:txBody>
+      </p:sp>
+      <p:sp>
+        <p:nvSpPr>
+          <p:cNvPr id="25" name="Slide Number Placeholder 0"/>
+          <p:cNvSpPr>
+            <a:spLocks noGrp="1"/>
+          </p:cNvSpPr>
+          <p:nvPr>
+            <p:ph type="sldNum" sz="quarter" idx="4294967295"/>
+          </p:nvPr>
+        </p:nvSpPr>
+        <p:spPr>
+          <a:xfrm>
+            <a:off x="5821528" y="6473952"/>
+            <a:ext cx="548640" cy="274320"/>
+          </a:xfrm>
+          <a:prstGeom prst="rect">
+            <a:avLst/>
+          </a:prstGeom>
+          <a:extLst>
+            <a:ext uri="{C572A759-6A51-4108-AA02-DFA0A04FC94B}">
+              <ma14:wrappingTextBoxFlag xmlns:ma14="http://schemas.microsoft.com/office/mac/drawingml/2011/main" val="0"/>
+            </a:ext>
+          </a:extLst>
+        </p:spPr>
+        <p:txBody>
+          <a:bodyPr anchor="ctr"/>
+          <a:lstStyle>
+            <a:lvl1pPr>
+              <a:defRPr sz="1000">
+                <a:solidFill>
+                  <a:srgbClr val="8CA3C7"/>
+                </a:solidFill>
+                <a:latin typeface="Calibri"/>
+                <a:ea typeface="Calibri"/>
+                <a:cs typeface="Calibri"/>
+              </a:defRPr>
+            </a:lvl1pPr>
+          </a:lstStyle>
+          <a:p>
+            <a:pPr algn="ctr"/>
+            <a:fld id="{F7021451-1387-4CA6-816F-3879F97B5CBC}" type="slidenum">
+              <a:rPr b="0" lang="en-US"/>
+              <a:t>1</a:t>
+            </a:fld>
+            <a:endParaRPr lang="en-US"/>
           </a:p>
         </p:txBody>
       </p:sp>
@@ -2961,6 +3105,54 @@
           </a:p>
         </p:txBody>
       </p:sp>
+      <p:sp>
+        <p:nvSpPr>
+          <p:cNvPr id="25" name="Slide Number Placeholder 0"/>
+          <p:cNvSpPr>
+            <a:spLocks noGrp="1"/>
+          </p:cNvSpPr>
+          <p:nvPr>
+            <p:ph type="sldNum" sz="quarter" idx="4294967295"/>
+          </p:nvPr>
+        </p:nvSpPr>
+        <p:spPr>
+          <a:xfrm>
+            <a:off x="5821528" y="6473952"/>
+            <a:ext cx="548640" cy="274320"/>
+          </a:xfrm>
+          <a:prstGeom prst="rect">
+            <a:avLst/>
+          </a:prstGeom>
+          <a:extLst>
+            <a:ext uri="{C572A759-6A51-4108-AA02-DFA0A04FC94B}">
+              <ma14:wrappingTextBoxFlag xmlns:ma14="http://schemas.microsoft.com/office/mac/drawingml/2011/main" val="0"/>
+            </a:ext>
+          </a:extLst>
+        </p:spPr>
+        <p:txBody>
+          <a:bodyPr anchor="ctr"/>
+          <a:lstStyle>
+            <a:lvl1pPr>
+              <a:defRPr sz="1000">
+                <a:solidFill>
+                  <a:srgbClr val="5A6B85"/>
+                </a:solidFill>
+                <a:latin typeface="Calibri"/>
+                <a:ea typeface="Calibri"/>
+                <a:cs typeface="Calibri"/>
+              </a:defRPr>
+            </a:lvl1pPr>
+          </a:lstStyle>
+          <a:p>
+            <a:pPr algn="ctr"/>
+            <a:fld id="{F7021451-1387-4CA6-816F-3879F97B5CBC}" type="slidenum">
+              <a:rPr b="0" lang="en-US"/>
+              <a:t>10</a:t>
+            </a:fld>
+            <a:endParaRPr lang="en-US"/>
+          </a:p>
+        </p:txBody>
+      </p:sp>
     </p:spTree>
   </p:cSld>
   <p:clrMapOvr>
@@ -3287,6 +3479,54 @@
           </a:p>
         </p:txBody>
       </p:sp>
+      <p:sp>
+        <p:nvSpPr>
+          <p:cNvPr id="25" name="Slide Number Placeholder 0"/>
+          <p:cNvSpPr>
+            <a:spLocks noGrp="1"/>
+          </p:cNvSpPr>
+          <p:nvPr>
+            <p:ph type="sldNum" sz="quarter" idx="4294967295"/>
+          </p:nvPr>
+        </p:nvSpPr>
+        <p:spPr>
+          <a:xfrm>
+            <a:off x="5821528" y="6473952"/>
+            <a:ext cx="548640" cy="274320"/>
+          </a:xfrm>
+          <a:prstGeom prst="rect">
+            <a:avLst/>
+          </a:prstGeom>
+          <a:extLst>
+            <a:ext uri="{C572A759-6A51-4108-AA02-DFA0A04FC94B}">
+              <ma14:wrappingTextBoxFlag xmlns:ma14="http://schemas.microsoft.com/office/mac/drawingml/2011/main" val="0"/>
+            </a:ext>
+          </a:extLst>
+        </p:spPr>
+        <p:txBody>
+          <a:bodyPr anchor="ctr"/>
+          <a:lstStyle>
+            <a:lvl1pPr>
+              <a:defRPr sz="1000">
+                <a:solidFill>
+                  <a:srgbClr val="8CA3C7"/>
+                </a:solidFill>
+                <a:latin typeface="Calibri"/>
+                <a:ea typeface="Calibri"/>
+                <a:cs typeface="Calibri"/>
+              </a:defRPr>
+            </a:lvl1pPr>
+          </a:lstStyle>
+          <a:p>
+            <a:pPr algn="ctr"/>
+            <a:fld id="{F7021451-1387-4CA6-816F-3879F97B5CBC}" type="slidenum">
+              <a:rPr b="0" lang="en-US"/>
+              <a:t>11</a:t>
+            </a:fld>
+            <a:endParaRPr lang="en-US"/>
+          </a:p>
+        </p:txBody>
+      </p:sp>
     </p:spTree>
   </p:cSld>
   <p:clrMapOvr>
@@ -3828,6 +4068,54 @@
           </a:p>
         </p:txBody>
       </p:sp>
+      <p:sp>
+        <p:nvSpPr>
+          <p:cNvPr id="25" name="Slide Number Placeholder 0"/>
+          <p:cNvSpPr>
+            <a:spLocks noGrp="1"/>
+          </p:cNvSpPr>
+          <p:nvPr>
+            <p:ph type="sldNum" sz="quarter" idx="4294967295"/>
+          </p:nvPr>
+        </p:nvSpPr>
+        <p:spPr>
+          <a:xfrm>
+            <a:off x="5821528" y="6473952"/>
+            <a:ext cx="548640" cy="274320"/>
+          </a:xfrm>
+          <a:prstGeom prst="rect">
+            <a:avLst/>
+          </a:prstGeom>
+          <a:extLst>
+            <a:ext uri="{C572A759-6A51-4108-AA02-DFA0A04FC94B}">
+              <ma14:wrappingTextBoxFlag xmlns:ma14="http://schemas.microsoft.com/office/mac/drawingml/2011/main" val="0"/>
+            </a:ext>
+          </a:extLst>
+        </p:spPr>
+        <p:txBody>
+          <a:bodyPr anchor="ctr"/>
+          <a:lstStyle>
+            <a:lvl1pPr>
+              <a:defRPr sz="1000">
+                <a:solidFill>
+                  <a:srgbClr val="5A6B85"/>
+                </a:solidFill>
+                <a:latin typeface="Calibri"/>
+                <a:ea typeface="Calibri"/>
+                <a:cs typeface="Calibri"/>
+              </a:defRPr>
+            </a:lvl1pPr>
+          </a:lstStyle>
+          <a:p>
+            <a:pPr algn="ctr"/>
+            <a:fld id="{F7021451-1387-4CA6-816F-3879F97B5CBC}" type="slidenum">
+              <a:rPr b="0" lang="en-US"/>
+              <a:t>2</a:t>
+            </a:fld>
+            <a:endParaRPr lang="en-US"/>
+          </a:p>
+        </p:txBody>
+      </p:sp>
     </p:spTree>
   </p:cSld>
   <p:clrMapOvr>
@@ -4259,6 +4547,54 @@
           </a:p>
         </p:txBody>
       </p:sp>
+      <p:sp>
+        <p:nvSpPr>
+          <p:cNvPr id="25" name="Slide Number Placeholder 0"/>
+          <p:cNvSpPr>
+            <a:spLocks noGrp="1"/>
+          </p:cNvSpPr>
+          <p:nvPr>
+            <p:ph type="sldNum" sz="quarter" idx="4294967295"/>
+          </p:nvPr>
+        </p:nvSpPr>
+        <p:spPr>
+          <a:xfrm>
+            <a:off x="5821528" y="6473952"/>
+            <a:ext cx="548640" cy="274320"/>
+          </a:xfrm>
+          <a:prstGeom prst="rect">
+            <a:avLst/>
+          </a:prstGeom>
+          <a:extLst>
+            <a:ext uri="{C572A759-6A51-4108-AA02-DFA0A04FC94B}">
+              <ma14:wrappingTextBoxFlag xmlns:ma14="http://schemas.microsoft.com/office/mac/drawingml/2011/main" val="0"/>
+            </a:ext>
+          </a:extLst>
+        </p:spPr>
+        <p:txBody>
+          <a:bodyPr anchor="ctr"/>
+          <a:lstStyle>
+            <a:lvl1pPr>
+              <a:defRPr sz="1000">
+                <a:solidFill>
+                  <a:srgbClr val="5A6B85"/>
+                </a:solidFill>
+                <a:latin typeface="Calibri"/>
+                <a:ea typeface="Calibri"/>
+                <a:cs typeface="Calibri"/>
+              </a:defRPr>
+            </a:lvl1pPr>
+          </a:lstStyle>
+          <a:p>
+            <a:pPr algn="ctr"/>
+            <a:fld id="{F7021451-1387-4CA6-816F-3879F97B5CBC}" type="slidenum">
+              <a:rPr b="0" lang="en-US"/>
+              <a:t>3</a:t>
+            </a:fld>
+            <a:endParaRPr lang="en-US"/>
+          </a:p>
+        </p:txBody>
+      </p:sp>
     </p:spTree>
   </p:cSld>
   <p:clrMapOvr>
@@ -4704,6 +5040,54 @@
           </a:p>
         </p:txBody>
       </p:sp>
+      <p:sp>
+        <p:nvSpPr>
+          <p:cNvPr id="25" name="Slide Number Placeholder 0"/>
+          <p:cNvSpPr>
+            <a:spLocks noGrp="1"/>
+          </p:cNvSpPr>
+          <p:nvPr>
+            <p:ph type="sldNum" sz="quarter" idx="4294967295"/>
+          </p:nvPr>
+        </p:nvSpPr>
+        <p:spPr>
+          <a:xfrm>
+            <a:off x="5821528" y="6473952"/>
+            <a:ext cx="548640" cy="274320"/>
+          </a:xfrm>
+          <a:prstGeom prst="rect">
+            <a:avLst/>
+          </a:prstGeom>
+          <a:extLst>
+            <a:ext uri="{C572A759-6A51-4108-AA02-DFA0A04FC94B}">
+              <ma14:wrappingTextBoxFlag xmlns:ma14="http://schemas.microsoft.com/office/mac/drawingml/2011/main" val="0"/>
+            </a:ext>
+          </a:extLst>
+        </p:spPr>
+        <p:txBody>
+          <a:bodyPr anchor="ctr"/>
+          <a:lstStyle>
+            <a:lvl1pPr>
+              <a:defRPr sz="1000">
+                <a:solidFill>
+                  <a:srgbClr val="5A6B85"/>
+                </a:solidFill>
+                <a:latin typeface="Calibri"/>
+                <a:ea typeface="Calibri"/>
+                <a:cs typeface="Calibri"/>
+              </a:defRPr>
+            </a:lvl1pPr>
+          </a:lstStyle>
+          <a:p>
+            <a:pPr algn="ctr"/>
+            <a:fld id="{F7021451-1387-4CA6-816F-3879F97B5CBC}" type="slidenum">
+              <a:rPr b="0" lang="en-US"/>
+              <a:t>4</a:t>
+            </a:fld>
+            <a:endParaRPr lang="en-US"/>
+          </a:p>
+        </p:txBody>
+      </p:sp>
     </p:spTree>
   </p:cSld>
   <p:clrMapOvr>
@@ -5075,6 +5459,54 @@
           </a:p>
         </p:txBody>
       </p:sp>
+      <p:sp>
+        <p:nvSpPr>
+          <p:cNvPr id="25" name="Slide Number Placeholder 0"/>
+          <p:cNvSpPr>
+            <a:spLocks noGrp="1"/>
+          </p:cNvSpPr>
+          <p:nvPr>
+            <p:ph type="sldNum" sz="quarter" idx="4294967295"/>
+          </p:nvPr>
+        </p:nvSpPr>
+        <p:spPr>
+          <a:xfrm>
+            <a:off x="5821528" y="6473952"/>
+            <a:ext cx="548640" cy="274320"/>
+          </a:xfrm>
+          <a:prstGeom prst="rect">
+            <a:avLst/>
+          </a:prstGeom>
+          <a:extLst>
+            <a:ext uri="{C572A759-6A51-4108-AA02-DFA0A04FC94B}">
+              <ma14:wrappingTextBoxFlag xmlns:ma14="http://schemas.microsoft.com/office/mac/drawingml/2011/main" val="0"/>
+            </a:ext>
+          </a:extLst>
+        </p:spPr>
+        <p:txBody>
+          <a:bodyPr anchor="ctr"/>
+          <a:lstStyle>
+            <a:lvl1pPr>
+              <a:defRPr sz="1000">
+                <a:solidFill>
+                  <a:srgbClr val="8CA3C7"/>
+                </a:solidFill>
+                <a:latin typeface="Calibri"/>
+                <a:ea typeface="Calibri"/>
+                <a:cs typeface="Calibri"/>
+              </a:defRPr>
+            </a:lvl1pPr>
+          </a:lstStyle>
+          <a:p>
+            <a:pPr algn="ctr"/>
+            <a:fld id="{F7021451-1387-4CA6-816F-3879F97B5CBC}" type="slidenum">
+              <a:rPr b="0" lang="en-US"/>
+              <a:t>5</a:t>
+            </a:fld>
+            <a:endParaRPr lang="en-US"/>
+          </a:p>
+        </p:txBody>
+      </p:sp>
     </p:spTree>
   </p:cSld>
   <p:clrMapOvr>
@@ -5140,7 +5572,7 @@
                 <a:ea typeface="Calibri" pitchFamily="34" charset="-122"/>
                 <a:cs typeface="Calibri" pitchFamily="34" charset="-120"/>
               </a:rPr>
-              <a:t>APPLYING THIS WITH</a:t>
+              <a:t>APPLYING THE CONCEPTS</a:t>
             </a:r>
             <a:endParaRPr lang="en-US" sz="1400" dirty="0"/>
           </a:p>
@@ -5260,6 +5692,54 @@
               <a:t>Spec-Driven Development with Agentic AI</a:t>
             </a:r>
             <a:endParaRPr lang="en-US" sz="1000" dirty="0"/>
+          </a:p>
+        </p:txBody>
+      </p:sp>
+      <p:sp>
+        <p:nvSpPr>
+          <p:cNvPr id="25" name="Slide Number Placeholder 0"/>
+          <p:cNvSpPr>
+            <a:spLocks noGrp="1"/>
+          </p:cNvSpPr>
+          <p:nvPr>
+            <p:ph type="sldNum" sz="quarter" idx="4294967295"/>
+          </p:nvPr>
+        </p:nvSpPr>
+        <p:spPr>
+          <a:xfrm>
+            <a:off x="5821528" y="6473952"/>
+            <a:ext cx="548640" cy="274320"/>
+          </a:xfrm>
+          <a:prstGeom prst="rect">
+            <a:avLst/>
+          </a:prstGeom>
+          <a:extLst>
+            <a:ext uri="{C572A759-6A51-4108-AA02-DFA0A04FC94B}">
+              <ma14:wrappingTextBoxFlag xmlns:ma14="http://schemas.microsoft.com/office/mac/drawingml/2011/main" val="0"/>
+            </a:ext>
+          </a:extLst>
+        </p:spPr>
+        <p:txBody>
+          <a:bodyPr anchor="ctr"/>
+          <a:lstStyle>
+            <a:lvl1pPr>
+              <a:defRPr sz="1000">
+                <a:solidFill>
+                  <a:srgbClr val="8CA3C7"/>
+                </a:solidFill>
+                <a:latin typeface="Calibri"/>
+                <a:ea typeface="Calibri"/>
+                <a:cs typeface="Calibri"/>
+              </a:defRPr>
+            </a:lvl1pPr>
+          </a:lstStyle>
+          <a:p>
+            <a:pPr algn="ctr"/>
+            <a:fld id="{F7021451-1387-4CA6-816F-3879F97B5CBC}" type="slidenum">
+              <a:rPr b="0" lang="en-US"/>
+              <a:t>6</a:t>
+            </a:fld>
+            <a:endParaRPr lang="en-US"/>
           </a:p>
         </p:txBody>
       </p:sp>
@@ -5839,6 +6319,54 @@
           </a:p>
         </p:txBody>
       </p:sp>
+      <p:sp>
+        <p:nvSpPr>
+          <p:cNvPr id="25" name="Slide Number Placeholder 0"/>
+          <p:cNvSpPr>
+            <a:spLocks noGrp="1"/>
+          </p:cNvSpPr>
+          <p:nvPr>
+            <p:ph type="sldNum" sz="quarter" idx="4294967295"/>
+          </p:nvPr>
+        </p:nvSpPr>
+        <p:spPr>
+          <a:xfrm>
+            <a:off x="5821528" y="6473952"/>
+            <a:ext cx="548640" cy="274320"/>
+          </a:xfrm>
+          <a:prstGeom prst="rect">
+            <a:avLst/>
+          </a:prstGeom>
+          <a:extLst>
+            <a:ext uri="{C572A759-6A51-4108-AA02-DFA0A04FC94B}">
+              <ma14:wrappingTextBoxFlag xmlns:ma14="http://schemas.microsoft.com/office/mac/drawingml/2011/main" val="0"/>
+            </a:ext>
+          </a:extLst>
+        </p:spPr>
+        <p:txBody>
+          <a:bodyPr anchor="ctr"/>
+          <a:lstStyle>
+            <a:lvl1pPr>
+              <a:defRPr sz="1000">
+                <a:solidFill>
+                  <a:srgbClr val="5A6B85"/>
+                </a:solidFill>
+                <a:latin typeface="Calibri"/>
+                <a:ea typeface="Calibri"/>
+                <a:cs typeface="Calibri"/>
+              </a:defRPr>
+            </a:lvl1pPr>
+          </a:lstStyle>
+          <a:p>
+            <a:pPr algn="ctr"/>
+            <a:fld id="{F7021451-1387-4CA6-816F-3879F97B5CBC}" type="slidenum">
+              <a:rPr b="0" lang="en-US"/>
+              <a:t>7</a:t>
+            </a:fld>
+            <a:endParaRPr lang="en-US"/>
+          </a:p>
+        </p:txBody>
+      </p:sp>
     </p:spTree>
   </p:cSld>
   <p:clrMapOvr>
@@ -5904,7 +6432,7 @@
                 <a:ea typeface="Calibri" pitchFamily="34" charset="-122"/>
                 <a:cs typeface="Calibri" pitchFamily="34" charset="-120"/>
               </a:rPr>
-              <a:t>APPLYING THIS WITH</a:t>
+              <a:t>APPLYING THE CONCEPTS</a:t>
             </a:r>
             <a:endParaRPr lang="en-US" sz="1400" dirty="0"/>
           </a:p>
@@ -5957,45 +6485,6 @@
         </p:nvSpPr>
         <p:spPr>
           <a:xfrm>
-            <a:off x="548640" y="3977640"/>
-            <a:ext cx="9722815" cy="822960"/>
-          </a:xfrm>
-          <a:prstGeom prst="rect">
-            <a:avLst/>
-          </a:prstGeom>
-          <a:noFill/>
-          <a:ln/>
-        </p:spPr>
-        <p:txBody>
-          <a:bodyPr wrap="square" rtlCol="0" anchor="ctr"/>
-          <a:lstStyle/>
-          <a:p>
-            <a:pPr algn="l" indent="0" marL="0">
-              <a:buNone/>
-            </a:pPr>
-            <a:r>
-              <a:rPr lang="en-US" sz="1600" i="1" dirty="0">
-                <a:solidFill>
-                  <a:srgbClr val="FFFFFF"/>
-                </a:solidFill>
-                <a:latin typeface="Calibri" pitchFamily="34" charset="0"/>
-                <a:ea typeface="Calibri" pitchFamily="34" charset="-122"/>
-                <a:cs typeface="Calibri" pitchFamily="34" charset="-120"/>
-              </a:rPr>
-              <a:t>A partial fit: some of this module's concept maps, some doesn't.</a:t>
-            </a:r>
-            <a:endParaRPr lang="en-US" sz="1600" dirty="0"/>
-          </a:p>
-        </p:txBody>
-      </p:sp>
-      <p:sp>
-        <p:nvSpPr>
-          <p:cNvPr id="5" name="Text 3"/>
-          <p:cNvSpPr/>
-          <p:nvPr/>
-        </p:nvSpPr>
-        <p:spPr>
-          <a:xfrm>
             <a:off x="548640" y="6473952"/>
             <a:ext cx="5486400" cy="274320"/>
           </a:xfrm>
@@ -6029,7 +6518,7 @@
       </p:sp>
       <p:sp>
         <p:nvSpPr>
-          <p:cNvPr id="6" name="Text 4"/>
+          <p:cNvPr id="5" name="Text 3"/>
           <p:cNvSpPr/>
           <p:nvPr/>
         </p:nvSpPr>
@@ -6063,6 +6552,54 @@
               <a:t>Spec-Driven Development with Agentic AI</a:t>
             </a:r>
             <a:endParaRPr lang="en-US" sz="1000" dirty="0"/>
+          </a:p>
+        </p:txBody>
+      </p:sp>
+      <p:sp>
+        <p:nvSpPr>
+          <p:cNvPr id="25" name="Slide Number Placeholder 0"/>
+          <p:cNvSpPr>
+            <a:spLocks noGrp="1"/>
+          </p:cNvSpPr>
+          <p:nvPr>
+            <p:ph type="sldNum" sz="quarter" idx="4294967295"/>
+          </p:nvPr>
+        </p:nvSpPr>
+        <p:spPr>
+          <a:xfrm>
+            <a:off x="5821528" y="6473952"/>
+            <a:ext cx="548640" cy="274320"/>
+          </a:xfrm>
+          <a:prstGeom prst="rect">
+            <a:avLst/>
+          </a:prstGeom>
+          <a:extLst>
+            <a:ext uri="{C572A759-6A51-4108-AA02-DFA0A04FC94B}">
+              <ma14:wrappingTextBoxFlag xmlns:ma14="http://schemas.microsoft.com/office/mac/drawingml/2011/main" val="0"/>
+            </a:ext>
+          </a:extLst>
+        </p:spPr>
+        <p:txBody>
+          <a:bodyPr anchor="ctr"/>
+          <a:lstStyle>
+            <a:lvl1pPr>
+              <a:defRPr sz="1000">
+                <a:solidFill>
+                  <a:srgbClr val="8CA3C7"/>
+                </a:solidFill>
+                <a:latin typeface="Calibri"/>
+                <a:ea typeface="Calibri"/>
+                <a:cs typeface="Calibri"/>
+              </a:defRPr>
+            </a:lvl1pPr>
+          </a:lstStyle>
+          <a:p>
+            <a:pPr algn="ctr"/>
+            <a:fld id="{F7021451-1387-4CA6-816F-3879F97B5CBC}" type="slidenum">
+              <a:rPr b="0" lang="en-US"/>
+              <a:t>8</a:t>
+            </a:fld>
+            <a:endParaRPr lang="en-US"/>
           </a:p>
         </p:txBody>
       </p:sp>
@@ -6545,6 +7082,54 @@
               <a:t>Spec-Driven Development with Agentic AI</a:t>
             </a:r>
             <a:endParaRPr lang="en-US" sz="1000" dirty="0"/>
+          </a:p>
+        </p:txBody>
+      </p:sp>
+      <p:sp>
+        <p:nvSpPr>
+          <p:cNvPr id="25" name="Slide Number Placeholder 0"/>
+          <p:cNvSpPr>
+            <a:spLocks noGrp="1"/>
+          </p:cNvSpPr>
+          <p:nvPr>
+            <p:ph type="sldNum" sz="quarter" idx="4294967295"/>
+          </p:nvPr>
+        </p:nvSpPr>
+        <p:spPr>
+          <a:xfrm>
+            <a:off x="5821528" y="6473952"/>
+            <a:ext cx="548640" cy="274320"/>
+          </a:xfrm>
+          <a:prstGeom prst="rect">
+            <a:avLst/>
+          </a:prstGeom>
+          <a:extLst>
+            <a:ext uri="{C572A759-6A51-4108-AA02-DFA0A04FC94B}">
+              <ma14:wrappingTextBoxFlag xmlns:ma14="http://schemas.microsoft.com/office/mac/drawingml/2011/main" val="0"/>
+            </a:ext>
+          </a:extLst>
+        </p:spPr>
+        <p:txBody>
+          <a:bodyPr anchor="ctr"/>
+          <a:lstStyle>
+            <a:lvl1pPr>
+              <a:defRPr sz="1000">
+                <a:solidFill>
+                  <a:srgbClr val="5A6B85"/>
+                </a:solidFill>
+                <a:latin typeface="Calibri"/>
+                <a:ea typeface="Calibri"/>
+                <a:cs typeface="Calibri"/>
+              </a:defRPr>
+            </a:lvl1pPr>
+          </a:lstStyle>
+          <a:p>
+            <a:pPr algn="ctr"/>
+            <a:fld id="{F7021451-1387-4CA6-816F-3879F97B5CBC}" type="slidenum">
+              <a:rPr b="0" lang="en-US"/>
+              <a:t>9</a:t>
+            </a:fld>
+            <a:endParaRPr lang="en-US"/>
           </a:p>
         </p:txBody>
       </p:sp>

--- a/presentation/Module-3_Establishing-Governance-and-Writing-a-Clarified-Specification.pptx
+++ b/presentation/Module-3_Establishing-Governance-and-Writing-a-Clarified-Specification.pptx
@@ -3277,7 +3277,7 @@
                 <a:ea typeface="Calibri" pitchFamily="34" charset="-122"/>
                 <a:cs typeface="Calibri" pitchFamily="34" charset="-120"/>
               </a:rPr>
-              <a:t>Governance has to exist before code is judged against it.</a:t>
+              <a:t>Governance has to exist before code is judged against it, otherwise every review starts from a different, unstated standard.</a:t>
             </a:r>
             <a:endParaRPr lang="en-US" sz="1700" dirty="0"/>
           </a:p>
@@ -3336,7 +3336,7 @@
                 <a:ea typeface="Calibri" pitchFamily="34" charset="-122"/>
                 <a:cs typeface="Calibri" pitchFamily="34" charset="-120"/>
               </a:rPr>
-              <a:t>EARS keeps requirements testable regardless of which framework carries them.</a:t>
+              <a:t>EARS keeps requirements testable regardless of which framework carries them, since the format itself, not the tool, is what makes a requirement checkable.</a:t>
             </a:r>
             <a:endParaRPr lang="en-US" sz="1700" dirty="0"/>
           </a:p>
@@ -3395,7 +3395,7 @@
                 <a:ea typeface="Calibri" pitchFamily="34" charset="-122"/>
                 <a:cs typeface="Calibri" pitchFamily="34" charset="-120"/>
               </a:rPr>
-              <a:t>Clarify early: it's cheap now and expensive once a plan is built on top of ambiguity.</a:t>
+              <a:t>Clarify early: it's cheap now and expensive once a plan is built on top of ambiguity that nobody caught in time.</a:t>
             </a:r>
             <a:endParaRPr lang="en-US" sz="1700" dirty="0"/>
           </a:p>
@@ -4301,7 +4301,7 @@
                 <a:ea typeface="Calibri" pitchFamily="34" charset="-122"/>
                 <a:cs typeface="Calibri" pitchFamily="34" charset="-120"/>
               </a:rPr>
-              <a:t>Encodes principles, code quality standards, testing requirements, and architectural constraints.</a:t>
+              <a:t>Encodes principles, code quality standards, testing requirements, and architectural constraints, so "good" is defined once instead of re-argued on every pull request.</a:t>
             </a:r>
             <a:endParaRPr lang="en-US" sz="1500" dirty="0"/>
           </a:p>
@@ -4382,7 +4382,7 @@
                 <a:ea typeface="Calibri" pitchFamily="34" charset="-122"/>
                 <a:cs typeface="Calibri" pitchFamily="34" charset="-120"/>
               </a:rPr>
-              <a:t>Written once up front, informed by Module 2's discovery, and checked against by every later phase.</a:t>
+              <a:t>Written once up front, informed by Module 2's discovery, and checked against by every later phase, which is what keeps plans and code from drifting away from team standards over time.</a:t>
             </a:r>
             <a:endParaRPr lang="en-US" sz="1500" dirty="0"/>
           </a:p>
@@ -4463,7 +4463,7 @@
                 <a:ea typeface="Calibri" pitchFamily="34" charset="-122"/>
                 <a:cs typeface="Calibri" pitchFamily="34" charset="-120"/>
               </a:rPr>
-              <a:t>Without it, every generated plan and every piece of code is evaluated against nothing.</a:t>
+              <a:t>Without it, every generated plan and every piece of code is evaluated against nothing, which means quality depends entirely on whoever happens to be reviewing that day.</a:t>
             </a:r>
             <a:endParaRPr lang="en-US" sz="1500" dirty="0"/>
           </a:p>
@@ -4794,7 +4794,7 @@
                 <a:ea typeface="Calibri" pitchFamily="34" charset="-122"/>
                 <a:cs typeface="Calibri" pitchFamily="34" charset="-120"/>
               </a:rPr>
-              <a:t>"When/if [condition]... the system shall [response]." Testable, unambiguous, one behavior per statement.</a:t>
+              <a:t>"When/if [condition]... the system shall [response]." Testable, unambiguous, one behavior per statement, so a requirement can be checked off as done or not done, with no room for interpretation.</a:t>
             </a:r>
             <a:endParaRPr lang="en-US" sz="1500" dirty="0"/>
           </a:p>
@@ -4875,7 +4875,7 @@
                 <a:ea typeface="Calibri" pitchFamily="34" charset="-122"/>
                 <a:cs typeface="Calibri" pitchFamily="34" charset="-120"/>
               </a:rPr>
-              <a:t>Specs come from two different sources on this course: a new-feature request and an existing defect pulled from the tracker.</a:t>
+              <a:t>Specs come from two different sources on this course: a new-feature request and an existing defect pulled from the tracker, because those two inputs need to produce the same rigor of spec even though they start from very different starting points.</a:t>
             </a:r>
             <a:endParaRPr lang="en-US" sz="1500" dirty="0"/>
           </a:p>
@@ -4956,7 +4956,7 @@
                 <a:ea typeface="Calibri" pitchFamily="34" charset="-122"/>
                 <a:cs typeface="Calibri" pitchFamily="34" charset="-120"/>
               </a:rPr>
-              <a:t>A clarify pass surfaces ambiguities and edge cases before they get baked into a plan.</a:t>
+              <a:t>A clarify pass surfaces ambiguities and edge cases before they get baked into a plan, which is far cheaper than discovering them after code has already been written against the wrong assumption.</a:t>
             </a:r>
             <a:endParaRPr lang="en-US" sz="1500" dirty="0"/>
           </a:p>
@@ -5253,7 +5253,7 @@
                 <a:ea typeface="Calibri" pitchFamily="34" charset="-122"/>
                 <a:cs typeface="Calibri" pitchFamily="34" charset="-120"/>
               </a:rPr>
-              <a:t>Constitution and clarified spec approximate requirements and design.</a:t>
+              <a:t>Constitution and clarified spec approximate requirements and design; plan and tasks approximate technical design and iteration planning, so nothing here replaces your existing process, it just gives each phase a concrete, agent-readable artifact.</a:t>
             </a:r>
             <a:endParaRPr lang="en-US" sz="1500" dirty="0"/>
           </a:p>
@@ -5314,7 +5314,7 @@
                 <a:ea typeface="Calibri" pitchFamily="34" charset="-122"/>
                 <a:cs typeface="Calibri" pitchFamily="34" charset="-120"/>
               </a:rPr>
-              <a:t>Plan and tasks approximate technical design and iteration planning.</a:t>
+              <a:t>Checklist and analyze approximate QA and test planning, implement approximates development, and review plus living docs approximate code review, QA, and maintenance, which is why teams can adopt SDD without abandoning the SDLC stages they already know.</a:t>
             </a:r>
             <a:endParaRPr lang="en-US" sz="1500" dirty="0"/>
           </a:p>
@@ -5322,68 +5322,7 @@
       </p:sp>
       <p:sp>
         <p:nvSpPr>
-          <p:cNvPr id="8" name="Shape 6"/>
-          <p:cNvSpPr/>
-          <p:nvPr/>
-        </p:nvSpPr>
-        <p:spPr>
-          <a:xfrm>
-            <a:off x="548640" y="4754880"/>
-            <a:ext cx="11094415" cy="713232"/>
-          </a:xfrm>
-          <a:prstGeom prst="roundRect">
-            <a:avLst>
-              <a:gd name="adj" fmla="val 10256"/>
-            </a:avLst>
-          </a:prstGeom>
-          <a:solidFill>
-            <a:srgbClr val="233A63"/>
-          </a:solidFill>
-          <a:ln/>
-        </p:spPr>
-      </p:sp>
-      <p:sp>
-        <p:nvSpPr>
-          <p:cNvPr id="9" name="Text 7"/>
-          <p:cNvSpPr/>
-          <p:nvPr/>
-        </p:nvSpPr>
-        <p:spPr>
-          <a:xfrm>
-            <a:off x="822960" y="4754880"/>
-            <a:ext cx="10545775" cy="713232"/>
-          </a:xfrm>
-          <a:prstGeom prst="rect">
-            <a:avLst/>
-          </a:prstGeom>
-          <a:noFill/>
-          <a:ln/>
-        </p:spPr>
-        <p:txBody>
-          <a:bodyPr wrap="square" rtlCol="0" anchor="ctr"/>
-          <a:lstStyle/>
-          <a:p>
-            <a:pPr indent="0" marL="0">
-              <a:buNone/>
-            </a:pPr>
-            <a:r>
-              <a:rPr lang="en-US" sz="1500" dirty="0">
-                <a:solidFill>
-                  <a:srgbClr val="E4ECFA"/>
-                </a:solidFill>
-                <a:latin typeface="Calibri" pitchFamily="34" charset="0"/>
-                <a:ea typeface="Calibri" pitchFamily="34" charset="-122"/>
-                <a:cs typeface="Calibri" pitchFamily="34" charset="-120"/>
-              </a:rPr>
-              <a:t>Checklist and analyze approximate QA and test planning. Implement approximates development. Review and living docs approximate code review, QA, and maintenance.</a:t>
-            </a:r>
-            <a:endParaRPr lang="en-US" sz="1500" dirty="0"/>
-          </a:p>
-        </p:txBody>
-      </p:sp>
-      <p:sp>
-        <p:nvSpPr>
-          <p:cNvPr id="10" name="Text 8"/>
+          <p:cNvPr id="8" name="Text 6"/>
           <p:cNvSpPr/>
           <p:nvPr/>
         </p:nvSpPr>
@@ -5422,7 +5361,7 @@
       </p:sp>
       <p:sp>
         <p:nvSpPr>
-          <p:cNvPr id="11" name="Text 9"/>
+          <p:cNvPr id="9" name="Text 7"/>
           <p:cNvSpPr/>
           <p:nvPr/>
         </p:nvSpPr>
@@ -5991,7 +5930,7 @@
                 <a:ea typeface="Calibri" pitchFamily="34" charset="-122"/>
                 <a:cs typeface="Calibri" pitchFamily="34" charset="-120"/>
               </a:rPr>
-              <a:t>Creates or updates the constitution and keeps dependent templates in sync.</a:t>
+              <a:t>Creates or updates the constitution and keeps dependent templates in sync, so a change to a principle automatically propagates instead of quietly going stale in one place.</a:t>
             </a:r>
             <a:endParaRPr lang="en-US" sz="1350" dirty="0"/>
           </a:p>
@@ -6113,7 +6052,7 @@
                 <a:ea typeface="Calibri" pitchFamily="34" charset="-122"/>
                 <a:cs typeface="Calibri" pitchFamily="34" charset="-120"/>
               </a:rPr>
-              <a:t>Creates the feature spec from natural language, focused on what and why, not tech stack.</a:t>
+              <a:t>Creates the feature spec from natural language, focused on what and why, not tech stack, which keeps the spec readable by non-engineers and stable even if the implementation approach later changes.</a:t>
             </a:r>
             <a:endParaRPr lang="en-US" sz="1350" dirty="0"/>
           </a:p>
@@ -6235,7 +6174,7 @@
                 <a:ea typeface="Calibri" pitchFamily="34" charset="-122"/>
                 <a:cs typeface="Calibri" pitchFamily="34" charset="-120"/>
               </a:rPr>
-              <a:t>Asks up to five targeted questions about underspecified areas and encodes your answers back into spec.md. Run it as many times as needed.</a:t>
+              <a:t>Asks up to five targeted questions about underspecified areas and encodes your answers back into spec.md. Run it as many times as needed, since one pass often surfaces a follow-up question the first round didn't anticipate.</a:t>
             </a:r>
             <a:endParaRPr lang="en-US" sz="1350" dirty="0"/>
           </a:p>
@@ -6804,7 +6743,7 @@
                 <a:ea typeface="Calibri" pitchFamily="34" charset="-122"/>
                 <a:cs typeface="Calibri" pitchFamily="34" charset="-120"/>
               </a:rPr>
-              <a:t>No dedicated governance command: project conventions live in openspec/config.yaml rather than a generated document.</a:t>
+              <a:t>No dedicated governance command: project conventions live in openspec/config.yaml rather than a generated document, so governance is configuration you maintain directly instead of an artifact a command produces for you.</a:t>
             </a:r>
             <a:endParaRPr lang="en-US" sz="1400" dirty="0"/>
           </a:p>
@@ -6926,7 +6865,7 @@
                 <a:ea typeface="Calibri" pitchFamily="34" charset="-122"/>
                 <a:cs typeface="Calibri" pitchFamily="34" charset="-120"/>
               </a:rPr>
-              <a:t>Generates proposal.md plus delta specs/ marking ADDED, MODIFIED, REMOVED requirements, each with Given/When/Then scenarios: OpenSpec's equivalent of testable acceptance criteria.</a:t>
+              <a:t>Generates proposal.md plus delta specs/ marking ADDED, MODIFIED, REMOVED requirements, each with Given/When/Then scenarios: OpenSpec's equivalent of testable acceptance criteria, playing the same role EARS statements play in Spec Kit.</a:t>
             </a:r>
             <a:endParaRPr lang="en-US" sz="1350" dirty="0"/>
           </a:p>
@@ -7001,7 +6940,7 @@
                 <a:ea typeface="Calibri" pitchFamily="34" charset="-122"/>
                 <a:cs typeface="Calibri" pitchFamily="34" charset="-120"/>
               </a:rPr>
-              <a:t>No single dedicated clarify command: ambiguity gets sharpened beforehand with /opsx:explore, or reconciled afterward with /opsx:update.</a:t>
+              <a:t>No single dedicated clarify command: ambiguity gets sharpened beforehand with /opsx:explore, or reconciled afterward with /opsx:update, so the clarify step is distributed across the workflow rather than being one named command.</a:t>
             </a:r>
             <a:endParaRPr lang="en-US" sz="1400" dirty="0"/>
           </a:p>
